--- a/decks/geog-weather-hazards/geog-weather-hazards_ch2_storm-formation.pptx
+++ b/decks/geog-weather-hazards/geog-weather-hazards_ch2_storm-formation.pptx
@@ -125,37 +125,37 @@
   <p:extLst>
     <p:ext uri="{521415D9-36F7-43E2-AB2F-B90AF26B5E84}">
       <p14:sectionLst xmlns:p14="http://schemas.microsoft.com/office/powerpoint/2010/main">
-        <p14:section name="Opening" id="{491d5c3e-ed9a-f5c2-d103-148c19ac6971}">
+        <p14:section name="Opening" id="{5718c456-e359-a04c-8111-6ad5e41e5ccc}">
           <p14:sldIdLst>
             <p14:sldId id="256"/>
           </p14:sldIdLst>
         </p14:section>
-        <p14:section name="Gate" id="{5796e259-6463-92cd-6b75-fa5e1b4ac0c0}">
+        <p14:section name="Gate" id="{19d69ae2-eb4f-2f9c-c3eb-a734b6e1a99a}">
           <p14:sldIdLst>
             <p14:sldId id="257"/>
             <p14:sldId id="258"/>
           </p14:sldIdLst>
         </p14:section>
-        <p14:section name="Pre-teach" id="{5fd1059f-974e-4a49-34a0-354a3c106cc6}">
+        <p14:section name="Pre-teach" id="{c8477811-56eb-91a7-48e6-7480006a1ded}">
           <p14:sldIdLst>
             <p14:sldId id="259"/>
             <p14:sldId id="260"/>
           </p14:sldIdLst>
         </p14:section>
-        <p14:section name="Read-along" id="{f8ebf501-69f7-c38d-0494-bff407419209}">
+        <p14:section name="Read-along" id="{1934150f-d1e6-8662-f58c-e6eae2f21072}">
           <p14:sldIdLst>
             <p14:sldId id="261"/>
             <p14:sldId id="262"/>
           </p14:sldIdLst>
         </p14:section>
-        <p14:section name="Teach" id="{723a1f0b-e5ce-d6a7-faea-44e860627c61}">
+        <p14:section name="Teach" id="{2f13c7a8-be8f-a858-ef3c-0f0233525516}">
           <p14:sldIdLst>
             <p14:sldId id="263"/>
             <p14:sldId id="264"/>
             <p14:sldId id="265"/>
           </p14:sldIdLst>
         </p14:section>
-        <p14:section name="Routes" id="{fd0ac7c7-f84b-de67-240a-5cd4d6e80047}">
+        <p14:section name="Routes" id="{a463791e-7a9b-9592-adde-14095f361543}">
           <p14:sldIdLst>
             <p14:sldId id="266"/>
             <p14:sldId id="267"/>
@@ -163,12 +163,12 @@
             <p14:sldId id="269"/>
           </p14:sldIdLst>
         </p14:section>
-        <p14:section name="Close" id="{2f06d8ec-999e-eeca-8d72-37a0b924cd10}">
+        <p14:section name="Close" id="{06a28c92-bc31-fb0e-4eab-6555768659fb}">
           <p14:sldIdLst>
             <p14:sldId id="270"/>
           </p14:sldIdLst>
         </p14:section>
-        <p14:section name="Answers" id="{9abdf4ad-6bd3-29ea-2109-62f128d54bc2}">
+        <p14:section name="Answers" id="{76690372-8ac1-c1a4-be67-dfad1f55d6f0}">
           <p14:sldIdLst>
             <p14:sldId id="271"/>
             <p14:sldId id="272"/>
@@ -2161,7 +2161,7 @@
               <a:t>Teach — Eight steps to a storm. Say it in your own words, then check understanding with a quick question: ask a pupil from the pre-teach group first, since they met these words and ideas before the lesson. Pupils try to recall before you re-explain.
 In class you sorted eight statements into the sequence that explains how a tropical storm forms. Here is that sequence, in your own words. Step one: air is heated above the surface of a warm tropical ocean. Once the sea reaches around 27 degrees Celsius, evaporation increases sharply. Step two: the evaporation and heating make the warm, moist air rise rapidly, and this creates low pressure at the surface. Step three: the atmosphere tries to even out the pressure, so air rushes in from the surrounding areas of higher pressure towards the centre of the storm. This inrushing air is the storm's strong wind.
 Step four: the Coriolis effect, caused by the spin of the Earth, bends the inrushing winds so that they spiral upwards and around the low-pressure centre. A calm eye forms in the middle. Step five: as the air rises it cools, and its water vapour condenses to form huge, towering cumulonimbus clouds that release torrential rain. Condensation gives out heat (the heat that was taken in when the water evaporated), and this released heat is what powers the storm and keeps it growing. Step six: the air reaches its highest point around the eye, where it becomes cold and sinks back down inside the eye. Sinking air cannot form cloud, so the eye is dry, clear and much calmer.
-Step seven: the whole storm travels slowly across the ocean in the direction of the prevailing wind, usually westwards, picking up more moisture as it goes. Step eight: when the storm meets land it loses its source of moisture and heat from the ocean, so it loses power and weakens. The key words an examiner looks for are evaporation, rising air, low pressure, condensation, cumulonimbus, Coriolis effect, eye and landfall.
+Step seven: the whole storm travels slowly across the ocean in the direction of the prevailing wind, usually westwards, picking up more moisture as it goes. Step eight: when the storm crosses the coast the warm ocean beneath it is gone, so its supply of heat and moisture is cut off and it weakens. The key words an examiner looks for are evaporation, rising air, low pressure, condensation, cumulonimbus, Coriolis effect, eye and landfall.
 Tip: Learn the sequence as a chain of causes: warm sea makes evaporation; evaporation makes rising air; rising air makes low pressure; low pressure pulls in wind; the Earth's spin makes it rotate; condensation releases the heat that powers it.</a:t>
             </a:r>
             <a:endParaRPr lang="en-US" dirty="0"/>
